--- a/week07/Lab07.pptx
+++ b/week07/Lab07.pptx
@@ -215,7 +215,7 @@
           <a:p>
             <a:fld id="{D1237EF7-A117-46B7-88A8-1B7FB98FF0F2}" type="datetimeFigureOut">
               <a:rPr lang="zh-CN" altLang="en-US" smtClean="0"/>
-              <a:t>2025/4/1</a:t>
+              <a:t>2026/4/13</a:t>
             </a:fld>
             <a:endParaRPr lang="zh-CN" altLang="en-US"/>
           </a:p>
@@ -606,7 +606,7 @@
           <a:p>
             <a:fld id="{FC19A4FA-3D9A-4114-B0D5-759CBD56F1AB}" type="datetimeFigureOut">
               <a:rPr lang="zh-CN" altLang="en-US" smtClean="0"/>
-              <a:t>2025/4/1</a:t>
+              <a:t>2026/4/13</a:t>
             </a:fld>
             <a:endParaRPr lang="zh-CN" altLang="en-US"/>
           </a:p>
@@ -800,7 +800,7 @@
           <a:p>
             <a:fld id="{FC19A4FA-3D9A-4114-B0D5-759CBD56F1AB}" type="datetimeFigureOut">
               <a:rPr lang="zh-CN" altLang="en-US" smtClean="0"/>
-              <a:t>2025/4/1</a:t>
+              <a:t>2026/4/13</a:t>
             </a:fld>
             <a:endParaRPr lang="zh-CN" altLang="en-US"/>
           </a:p>
@@ -973,7 +973,7 @@
           <a:p>
             <a:fld id="{FC19A4FA-3D9A-4114-B0D5-759CBD56F1AB}" type="datetimeFigureOut">
               <a:rPr lang="zh-CN" altLang="en-US" smtClean="0"/>
-              <a:t>2025/4/1</a:t>
+              <a:t>2026/4/13</a:t>
             </a:fld>
             <a:endParaRPr lang="zh-CN" altLang="en-US"/>
           </a:p>
@@ -1157,7 +1157,7 @@
           <a:p>
             <a:fld id="{FC19A4FA-3D9A-4114-B0D5-759CBD56F1AB}" type="datetimeFigureOut">
               <a:rPr lang="zh-CN" altLang="en-US" smtClean="0"/>
-              <a:t>2025/4/1</a:t>
+              <a:t>2026/4/13</a:t>
             </a:fld>
             <a:endParaRPr lang="zh-CN" altLang="en-US"/>
           </a:p>
@@ -1414,7 +1414,7 @@
           <a:p>
             <a:fld id="{FC19A4FA-3D9A-4114-B0D5-759CBD56F1AB}" type="datetimeFigureOut">
               <a:rPr lang="zh-CN" altLang="en-US" smtClean="0"/>
-              <a:t>2025/4/1</a:t>
+              <a:t>2026/4/13</a:t>
             </a:fld>
             <a:endParaRPr lang="zh-CN" altLang="en-US"/>
           </a:p>
@@ -1801,7 +1801,7 @@
           <a:p>
             <a:fld id="{FC19A4FA-3D9A-4114-B0D5-759CBD56F1AB}" type="datetimeFigureOut">
               <a:rPr lang="zh-CN" altLang="en-US" smtClean="0"/>
-              <a:t>2025/4/1</a:t>
+              <a:t>2026/4/13</a:t>
             </a:fld>
             <a:endParaRPr lang="zh-CN" altLang="en-US"/>
           </a:p>
@@ -2069,7 +2069,7 @@
           <a:p>
             <a:fld id="{FC19A4FA-3D9A-4114-B0D5-759CBD56F1AB}" type="datetimeFigureOut">
               <a:rPr lang="zh-CN" altLang="en-US" smtClean="0"/>
-              <a:t>2025/4/1</a:t>
+              <a:t>2026/4/13</a:t>
             </a:fld>
             <a:endParaRPr lang="zh-CN" altLang="en-US"/>
           </a:p>
@@ -2209,7 +2209,7 @@
           <a:p>
             <a:fld id="{FC19A4FA-3D9A-4114-B0D5-759CBD56F1AB}" type="datetimeFigureOut">
               <a:rPr lang="zh-CN" altLang="en-US" smtClean="0"/>
-              <a:t>2025/4/1</a:t>
+              <a:t>2026/4/13</a:t>
             </a:fld>
             <a:endParaRPr lang="zh-CN" altLang="en-US"/>
           </a:p>
@@ -2299,7 +2299,7 @@
           <a:p>
             <a:fld id="{FC19A4FA-3D9A-4114-B0D5-759CBD56F1AB}" type="datetimeFigureOut">
               <a:rPr lang="zh-CN" altLang="en-US" smtClean="0"/>
-              <a:t>2025/4/1</a:t>
+              <a:t>2026/4/13</a:t>
             </a:fld>
             <a:endParaRPr lang="zh-CN" altLang="en-US"/>
           </a:p>
@@ -2569,7 +2569,7 @@
           <a:p>
             <a:fld id="{FC19A4FA-3D9A-4114-B0D5-759CBD56F1AB}" type="datetimeFigureOut">
               <a:rPr lang="zh-CN" altLang="en-US" smtClean="0"/>
-              <a:t>2025/4/1</a:t>
+              <a:t>2026/4/13</a:t>
             </a:fld>
             <a:endParaRPr lang="zh-CN" altLang="en-US"/>
           </a:p>
@@ -2816,7 +2816,7 @@
           <a:p>
             <a:fld id="{FC19A4FA-3D9A-4114-B0D5-759CBD56F1AB}" type="datetimeFigureOut">
               <a:rPr lang="zh-CN" altLang="en-US" smtClean="0"/>
-              <a:t>2025/4/1</a:t>
+              <a:t>2026/4/13</a:t>
             </a:fld>
             <a:endParaRPr lang="zh-CN" altLang="en-US"/>
           </a:p>
@@ -3022,7 +3022,7 @@
           <a:p>
             <a:fld id="{FC19A4FA-3D9A-4114-B0D5-759CBD56F1AB}" type="datetimeFigureOut">
               <a:rPr lang="zh-CN" altLang="en-US" smtClean="0"/>
-              <a:t>2025/4/1</a:t>
+              <a:t>2026/4/13</a:t>
             </a:fld>
             <a:endParaRPr lang="zh-CN" altLang="en-US"/>
           </a:p>
@@ -9542,7 +9542,7 @@
         <p:spPr>
           <a:xfrm>
             <a:off x="1075690" y="1207135"/>
-            <a:ext cx="10816590" cy="5015865"/>
+            <a:ext cx="10816590" cy="4401205"/>
           </a:xfrm>
           <a:prstGeom prst="rect">
             <a:avLst/>
@@ -9555,6 +9555,10 @@
           </a:bodyPr>
           <a:lstStyle/>
           <a:p>
+            <a:pPr marL="457200" indent="-457200">
+              <a:buFont typeface="+mj-lt"/>
+              <a:buAutoNum type="arabicPeriod"/>
+            </a:pPr>
             <a:r>
               <a:rPr lang="en-US" altLang="zh-CN" sz="2000" dirty="0"/>
               <a:t>O</a:t>
@@ -9597,13 +9601,10 @@
             </a:r>
           </a:p>
           <a:p>
-            <a:endParaRPr lang="en-US" altLang="zh-CN" sz="2000" dirty="0"/>
-          </a:p>
-          <a:p>
-            <a:r>
-              <a:rPr lang="zh-CN" altLang="en-US" sz="2000" dirty="0"/>
-              <a:t> </a:t>
-            </a:r>
+            <a:pPr marL="914400" lvl="1" indent="-457200">
+              <a:buFont typeface="Arial" panose="020B0604020202020204" pitchFamily="34" charset="0"/>
+              <a:buChar char="•"/>
+            </a:pPr>
             <a:r>
               <a:rPr lang="en-US" altLang="zh-CN" sz="2000" dirty="0"/>
               <a:t>S</a:t>
@@ -9622,13 +9623,24 @@
             </a:r>
             <a:r>
               <a:rPr lang="en-US" altLang="zh-CN" sz="2000" dirty="0"/>
-              <a:t>? Remember to check whether the pointer is valid.</a:t>
-            </a:r>
-          </a:p>
-          <a:p>
-            <a:endParaRPr lang="en-US" altLang="zh-CN" sz="2000" dirty="0"/>
-          </a:p>
-          <a:p>
+              <a:t>? Choose the better one.</a:t>
+            </a:r>
+          </a:p>
+          <a:p>
+            <a:pPr marL="914400" lvl="1" indent="-457200">
+              <a:buFont typeface="Arial" panose="020B0604020202020204" pitchFamily="34" charset="0"/>
+              <a:buChar char="•"/>
+            </a:pPr>
+            <a:r>
+              <a:rPr lang="en-US" altLang="zh-CN" sz="2000" dirty="0"/>
+              <a:t>Remember to check whether the pointer is valid.</a:t>
+            </a:r>
+          </a:p>
+          <a:p>
+            <a:pPr marL="457200" indent="-457200">
+              <a:buFont typeface="+mj-lt"/>
+              <a:buAutoNum type="arabicPeriod"/>
+            </a:pPr>
             <a:r>
               <a:rPr lang="en-GB" altLang="zh-CN" sz="2000" dirty="0"/>
               <a:t>Create a shared library “</a:t>
@@ -9639,7 +9651,7 @@
             </a:r>
             <a:r>
               <a:rPr lang="en-GB" altLang="zh-CN" sz="2000" dirty="0"/>
-              <a:t>” with 3 overloaded </a:t>
+              <a:t>” with the 3 overloaded </a:t>
             </a:r>
             <a:r>
               <a:rPr lang="en-GB" altLang="zh-CN" sz="2000" dirty="0" err="1"/>
@@ -9647,130 +9659,125 @@
             </a:r>
             <a:r>
               <a:rPr lang="en-GB" altLang="zh-CN" sz="2000" dirty="0"/>
-              <a:t>() functions in it, and then compile and run your program with this shared library.</a:t>
+              <a:t>() functions, and then link the shared library to generate your own program.</a:t>
             </a:r>
             <a:r>
               <a:rPr lang="en-US" altLang="en-GB" sz="2000" dirty="0"/>
-              <a:t> Test the address of each </a:t>
+              <a:t> Print the addresses of all </a:t>
+            </a:r>
+            <a:r>
+              <a:rPr lang="en-GB" altLang="zh-CN" sz="2000" dirty="0" err="1">
+                <a:sym typeface="+mn-ea"/>
+              </a:rPr>
+              <a:t>vabs</a:t>
             </a:r>
             <a:r>
               <a:rPr lang="en-GB" altLang="zh-CN" sz="2000" dirty="0">
                 <a:sym typeface="+mn-ea"/>
               </a:rPr>
-              <a:t> overloaded </a:t>
+              <a:t>() functions</a:t>
+            </a:r>
+            <a:r>
+              <a:rPr lang="en-US" altLang="en-GB" sz="2000" dirty="0">
+                <a:sym typeface="+mn-ea"/>
+              </a:rPr>
+              <a:t>.</a:t>
+            </a:r>
+            <a:endParaRPr lang="en-GB" altLang="zh-CN" sz="2000" dirty="0"/>
+          </a:p>
+          <a:p>
+            <a:pPr marL="457200" indent="-457200">
+              <a:buFont typeface="+mj-lt"/>
+              <a:buAutoNum type="arabicPeriod"/>
+            </a:pPr>
+            <a:r>
+              <a:rPr lang="en-GB" altLang="zh-CN" sz="2000" dirty="0">
+                <a:sym typeface="+mn-ea"/>
+              </a:rPr>
+              <a:t>Create a </a:t>
+            </a:r>
+            <a:r>
+              <a:rPr lang="en-US" altLang="en-GB" sz="2000" dirty="0">
+                <a:sym typeface="+mn-ea"/>
+              </a:rPr>
+              <a:t>static </a:t>
+            </a:r>
+            <a:r>
+              <a:rPr lang="en-GB" altLang="zh-CN" sz="2000" dirty="0">
+                <a:sym typeface="+mn-ea"/>
+              </a:rPr>
+              <a:t>library “</a:t>
             </a:r>
             <a:r>
               <a:rPr lang="en-GB" altLang="zh-CN" sz="2000" dirty="0" err="1">
                 <a:sym typeface="+mn-ea"/>
               </a:rPr>
-              <a:t>vabs</a:t>
+              <a:t>libvabs</a:t>
             </a:r>
             <a:r>
               <a:rPr lang="en-GB" altLang="zh-CN" sz="2000" dirty="0">
                 <a:sym typeface="+mn-ea"/>
               </a:rPr>
-              <a:t>() functions</a:t>
+              <a:t>.</a:t>
             </a:r>
             <a:r>
               <a:rPr lang="en-US" altLang="en-GB" sz="2000" dirty="0">
                 <a:sym typeface="+mn-ea"/>
               </a:rPr>
-              <a:t>.</a:t>
-            </a:r>
-            <a:endParaRPr lang="en-GB" altLang="zh-CN" sz="2000" dirty="0"/>
-          </a:p>
-          <a:p>
-            <a:endParaRPr lang="en-GB" altLang="zh-CN" sz="2000" dirty="0"/>
-          </a:p>
-          <a:p>
+              <a:t>a</a:t>
+            </a:r>
             <a:r>
               <a:rPr lang="en-GB" altLang="zh-CN" sz="2000" dirty="0">
                 <a:sym typeface="+mn-ea"/>
               </a:rPr>
-              <a:t>Create a </a:t>
+              <a:t>” with </a:t>
+            </a:r>
+            <a:r>
+              <a:rPr lang="en-GB" altLang="zh-CN" sz="2000" dirty="0"/>
+              <a:t>the </a:t>
+            </a:r>
+            <a:r>
+              <a:rPr lang="en-GB" altLang="zh-CN" sz="2000" dirty="0">
+                <a:sym typeface="+mn-ea"/>
+              </a:rPr>
+              <a:t>3 overloaded </a:t>
+            </a:r>
+            <a:r>
+              <a:rPr lang="en-GB" altLang="zh-CN" sz="2000" dirty="0" err="1">
+                <a:sym typeface="+mn-ea"/>
+              </a:rPr>
+              <a:t>vabs</a:t>
+            </a:r>
+            <a:r>
+              <a:rPr lang="en-GB" altLang="zh-CN" sz="2000" dirty="0">
+                <a:sym typeface="+mn-ea"/>
+              </a:rPr>
+              <a:t>() functions</a:t>
+            </a:r>
+            <a:r>
+              <a:rPr lang="en-GB" altLang="zh-CN" sz="2000" dirty="0"/>
+              <a:t>, and then link the shared library to generate your own program.</a:t>
+            </a:r>
+            <a:r>
+              <a:rPr lang="en-US" altLang="en-GB" sz="2000" dirty="0"/>
+              <a:t> Print the addresses of all </a:t>
+            </a:r>
+            <a:r>
+              <a:rPr lang="en-GB" altLang="zh-CN" sz="2000" dirty="0" err="1">
+                <a:sym typeface="+mn-ea"/>
+              </a:rPr>
+              <a:t>vabs</a:t>
+            </a:r>
+            <a:r>
+              <a:rPr lang="en-GB" altLang="zh-CN" sz="2000" dirty="0">
+                <a:sym typeface="+mn-ea"/>
+              </a:rPr>
+              <a:t>() functions</a:t>
             </a:r>
             <a:r>
               <a:rPr lang="en-US" altLang="en-GB" sz="2000" dirty="0">
                 <a:sym typeface="+mn-ea"/>
               </a:rPr>
-              <a:t>static </a:t>
-            </a:r>
-            <a:r>
-              <a:rPr lang="en-GB" altLang="zh-CN" sz="2000" dirty="0">
-                <a:sym typeface="+mn-ea"/>
-              </a:rPr>
-              <a:t>library “</a:t>
-            </a:r>
-            <a:r>
-              <a:rPr lang="en-GB" altLang="zh-CN" sz="2000" dirty="0" err="1">
-                <a:sym typeface="+mn-ea"/>
-              </a:rPr>
-              <a:t>libvabs.</a:t>
-            </a:r>
-            <a:r>
-              <a:rPr lang="en-US" altLang="en-GB" sz="2000" dirty="0" err="1">
-                <a:sym typeface="+mn-ea"/>
-              </a:rPr>
-              <a:t>a</a:t>
-            </a:r>
-            <a:r>
-              <a:rPr lang="en-GB" altLang="zh-CN" sz="2000" dirty="0">
-                <a:sym typeface="+mn-ea"/>
-              </a:rPr>
-              <a:t>” with 3 overloaded </a:t>
-            </a:r>
-            <a:r>
-              <a:rPr lang="en-GB" altLang="zh-CN" sz="2000" dirty="0" err="1">
-                <a:sym typeface="+mn-ea"/>
-              </a:rPr>
-              <a:t>vabs</a:t>
-            </a:r>
-            <a:r>
-              <a:rPr lang="en-GB" altLang="zh-CN" sz="2000" dirty="0">
-                <a:sym typeface="+mn-ea"/>
-              </a:rPr>
-              <a:t>() functions in it, and then compile and run your program with this </a:t>
-            </a:r>
-            <a:r>
-              <a:rPr lang="en-US" altLang="en-GB" sz="2000" dirty="0">
-                <a:sym typeface="+mn-ea"/>
-              </a:rPr>
-              <a:t>static </a:t>
-            </a:r>
-            <a:r>
-              <a:rPr lang="en-GB" altLang="zh-CN" sz="2000" dirty="0">
-                <a:sym typeface="+mn-ea"/>
-              </a:rPr>
-              <a:t>library.</a:t>
-            </a:r>
-            <a:r>
-              <a:rPr lang="en-US" altLang="en-GB" sz="2000" dirty="0">
-                <a:sym typeface="+mn-ea"/>
-              </a:rPr>
-              <a:t>Test the address of each </a:t>
-            </a:r>
-            <a:r>
-              <a:rPr lang="en-GB" altLang="zh-CN" sz="2000" dirty="0">
-                <a:sym typeface="+mn-ea"/>
-              </a:rPr>
-              <a:t> overloaded </a:t>
-            </a:r>
-            <a:r>
-              <a:rPr lang="en-GB" altLang="zh-CN" sz="2000" dirty="0" err="1">
-                <a:sym typeface="+mn-ea"/>
-              </a:rPr>
-              <a:t>vabs</a:t>
-            </a:r>
-            <a:r>
-              <a:rPr lang="en-GB" altLang="zh-CN" sz="2000" dirty="0">
-                <a:sym typeface="+mn-ea"/>
-              </a:rPr>
-              <a:t>() functions</a:t>
-            </a:r>
-            <a:r>
-              <a:rPr lang="en-US" altLang="en-GB" sz="2000" dirty="0">
-                <a:sym typeface="+mn-ea"/>
-              </a:rPr>
               <a:t>.</a:t>
             </a:r>
             <a:endParaRPr lang="en-GB" altLang="zh-CN" sz="2000" dirty="0"/>
@@ -9780,8 +9787,12 @@
           </a:p>
           <a:p>
             <a:r>
+              <a:rPr lang="en-US" altLang="en-GB" sz="2000" dirty="0" err="1"/>
+              <a:t>Expliain</a:t>
+            </a:r>
+            <a:r>
               <a:rPr lang="en-US" altLang="en-GB" sz="2000" dirty="0"/>
-              <a:t>Conclude the difference between static library and shared library according to your experimental results.</a:t>
+              <a:t> the differences between static library and shared library according to your experimental results.</a:t>
             </a:r>
             <a:endParaRPr lang="en-GB" altLang="zh-CN" sz="2000" dirty="0"/>
           </a:p>
@@ -9851,8 +9862,8 @@
         </p:nvSpPr>
         <p:spPr>
           <a:xfrm>
-            <a:off x="890310" y="1199471"/>
-            <a:ext cx="10683238" cy="3021547"/>
+            <a:off x="129123" y="2573882"/>
+            <a:ext cx="11867805" cy="4019897"/>
           </a:xfrm>
           <a:prstGeom prst="rect">
             <a:avLst/>
@@ -10032,20 +10043,66 @@
                 <a:spcPts val="1200"/>
               </a:spcBef>
               <a:buSzPct val="68000"/>
-              <a:buFont typeface="Wingdings" panose="05000000000000000000" pitchFamily="2" charset="2"/>
               <a:buNone/>
             </a:pPr>
             <a:r>
-              <a:rPr lang="en-US" altLang="zh-CN" dirty="0"/>
-              <a:t>Write a program that uses a function template called </a:t>
-            </a:r>
-            <a:r>
-              <a:rPr lang="en-US" altLang="zh-CN" b="1" i="1" dirty="0"/>
-              <a:t>Compare</a:t>
-            </a:r>
-            <a:r>
-              <a:rPr lang="en-US" altLang="zh-CN" dirty="0"/>
-              <a:t> to compare the relationship between the values of the two arguments and return 1 when the first argument is greater than the second one; return -1 when the first argument is smaller than the second one, return 0 when the both values are equal. Test the program using integer, character and floating-point number arguments and print the result of the comparation.</a:t>
+              <a:rPr lang="en-US" altLang="zh-CN" sz="2000" dirty="0"/>
+              <a:t>Create a function template named Compare.</a:t>
+            </a:r>
+            <a:r>
+              <a:rPr lang="zh-CN" altLang="en-US" sz="2000" dirty="0"/>
+              <a:t> </a:t>
+            </a:r>
+            <a:r>
+              <a:rPr lang="en-US" altLang="zh-CN" sz="2000" dirty="0"/>
+              <a:t>This function should take two arguments of the same type.</a:t>
+            </a:r>
+            <a:r>
+              <a:rPr lang="zh-CN" altLang="en-US" sz="2000" dirty="0"/>
+              <a:t> </a:t>
+            </a:r>
+            <a:r>
+              <a:rPr lang="en-US" altLang="zh-CN" sz="2000" dirty="0"/>
+              <a:t>It should compare their values and return an integer based on the result:</a:t>
+            </a:r>
+          </a:p>
+          <a:p>
+            <a:pPr marL="566420" lvl="2" indent="0">
+              <a:spcBef>
+                <a:spcPts val="1200"/>
+              </a:spcBef>
+              <a:buSzPct val="68000"/>
+              <a:buNone/>
+            </a:pPr>
+            <a:r>
+              <a:rPr lang="en-US" altLang="zh-CN" sz="1600" dirty="0"/>
+              <a:t>Return 1​ if the first argument is greater than​ the second.</a:t>
+            </a:r>
+          </a:p>
+          <a:p>
+            <a:pPr marL="566420" lvl="2" indent="0">
+              <a:spcBef>
+                <a:spcPts val="1200"/>
+              </a:spcBef>
+              <a:buSzPct val="68000"/>
+              <a:buNone/>
+            </a:pPr>
+            <a:r>
+              <a:rPr lang="en-US" altLang="zh-CN" sz="1600" dirty="0"/>
+              <a:t>Return -1​ if the first argument is less than​ the second.</a:t>
+            </a:r>
+          </a:p>
+          <a:p>
+            <a:pPr marL="566420" lvl="2" indent="0">
+              <a:spcBef>
+                <a:spcPts val="1200"/>
+              </a:spcBef>
+              <a:buSzPct val="68000"/>
+              <a:buNone/>
+            </a:pPr>
+            <a:r>
+              <a:rPr lang="en-US" altLang="zh-CN" sz="1600" dirty="0"/>
+              <a:t>Return 0​ if both values are equal.</a:t>
             </a:r>
           </a:p>
           <a:p>
@@ -10054,20 +10111,105 @@
                 <a:spcPts val="1200"/>
               </a:spcBef>
               <a:buSzPct val="68000"/>
-              <a:buFont typeface="Wingdings" panose="05000000000000000000" pitchFamily="2" charset="2"/>
               <a:buNone/>
             </a:pPr>
             <a:r>
-              <a:rPr lang="en-US" altLang="zh-CN" dirty="0"/>
-              <a:t>If there is a structure as follows, how to define an explicit specialization of the template function </a:t>
-            </a:r>
-            <a:r>
-              <a:rPr lang="en-US" altLang="zh-CN" b="1" dirty="0"/>
-              <a:t>Compare</a:t>
-            </a:r>
-            <a:r>
-              <a:rPr lang="en-US" altLang="zh-CN" dirty="0"/>
-              <a:t> and print the result of the comparation?</a:t>
+              <a:rPr lang="en-US" altLang="zh-CN" sz="2000" dirty="0"/>
+              <a:t>Test your function​ by calling it with different data types and printing the results. You must test with:</a:t>
+            </a:r>
+            <a:r>
+              <a:rPr lang="zh-CN" altLang="en-US" sz="2000" dirty="0"/>
+              <a:t> </a:t>
+            </a:r>
+            <a:r>
+              <a:rPr lang="en-US" altLang="zh-CN" sz="2000" dirty="0"/>
+              <a:t>two integers, two floating-point numbers, and two characters (char)</a:t>
+            </a:r>
+          </a:p>
+          <a:p>
+            <a:pPr marL="109220" lvl="1" indent="0">
+              <a:spcBef>
+                <a:spcPts val="1200"/>
+              </a:spcBef>
+              <a:buSzPct val="68000"/>
+              <a:buNone/>
+            </a:pPr>
+            <a:r>
+              <a:rPr lang="en-US" altLang="zh-CN" sz="2000" dirty="0"/>
+              <a:t>Now, you have a </a:t>
+            </a:r>
+            <a:r>
+              <a:rPr lang="en-US" altLang="zh-CN" sz="2000" dirty="0" err="1"/>
+              <a:t>stuinfo</a:t>
+            </a:r>
+            <a:r>
+              <a:rPr lang="zh-CN" altLang="en-US" sz="2000" dirty="0"/>
+              <a:t> </a:t>
+            </a:r>
+            <a:r>
+              <a:rPr lang="en-US" altLang="zh-CN" sz="2000" dirty="0"/>
+              <a:t>structure that stores a student‘s name(string) and age(integer).</a:t>
+            </a:r>
+            <a:r>
+              <a:rPr lang="zh-CN" altLang="en-US" sz="2000" dirty="0"/>
+              <a:t> </a:t>
+            </a:r>
+            <a:r>
+              <a:rPr lang="en-US" altLang="zh-CN" sz="2000" dirty="0"/>
+              <a:t>Create an explicit specialization​ of your Compare</a:t>
+            </a:r>
+            <a:r>
+              <a:rPr lang="zh-CN" altLang="en-US" sz="2000" dirty="0"/>
+              <a:t> </a:t>
+            </a:r>
+            <a:r>
+              <a:rPr lang="en-US" altLang="zh-CN" sz="2000" dirty="0"/>
+              <a:t>template for this </a:t>
+            </a:r>
+            <a:r>
+              <a:rPr lang="en-US" altLang="zh-CN" sz="2000" dirty="0" err="1"/>
+              <a:t>stuinfo</a:t>
+            </a:r>
+            <a:r>
+              <a:rPr lang="zh-CN" altLang="en-US" sz="2000" dirty="0"/>
+              <a:t> </a:t>
+            </a:r>
+            <a:r>
+              <a:rPr lang="en-US" altLang="zh-CN" sz="2000" dirty="0"/>
+              <a:t>structure.</a:t>
+            </a:r>
+            <a:r>
+              <a:rPr lang="zh-CN" altLang="en-US" sz="2000" dirty="0"/>
+              <a:t> </a:t>
+            </a:r>
+            <a:r>
+              <a:rPr lang="en-US" altLang="zh-CN" sz="2000" dirty="0"/>
+              <a:t>In this specialized version, the comparison should be based only on the student's age​ member.</a:t>
+            </a:r>
+          </a:p>
+          <a:p>
+            <a:pPr marL="109220" lvl="1" indent="0">
+              <a:spcBef>
+                <a:spcPts val="1200"/>
+              </a:spcBef>
+              <a:buSzPct val="68000"/>
+              <a:buNone/>
+            </a:pPr>
+            <a:r>
+              <a:rPr lang="en-US" altLang="zh-CN" sz="2000" dirty="0"/>
+              <a:t>Test this specialized function and print the result of comparing two </a:t>
+            </a:r>
+            <a:r>
+              <a:rPr lang="en-US" altLang="zh-CN" sz="2000" dirty="0" err="1"/>
+              <a:t>stuinfo</a:t>
+            </a:r>
+            <a:r>
+              <a:rPr lang="zh-CN" altLang="en-US" sz="2000" dirty="0"/>
+              <a:t> </a:t>
+            </a:r>
+            <a:r>
+              <a:rPr lang="en-US" altLang="zh-CN" sz="2000" dirty="0"/>
+              <a:t>objects.</a:t>
             </a:r>
           </a:p>
         </p:txBody>
@@ -10080,7 +10222,7 @@
         </p:nvSpPr>
         <p:spPr>
           <a:xfrm>
-            <a:off x="1311824" y="4322637"/>
+            <a:off x="1717093" y="1158950"/>
             <a:ext cx="1519006" cy="1200329"/>
           </a:xfrm>
           <a:prstGeom prst="rect">
@@ -10149,7 +10291,7 @@
         </p:blipFill>
         <p:spPr>
           <a:xfrm>
-            <a:off x="3333895" y="4580188"/>
+            <a:off x="4303049" y="1482785"/>
             <a:ext cx="4175270" cy="697539"/>
           </a:xfrm>
           <a:prstGeom prst="rect">
@@ -10165,7 +10307,7 @@
         </p:nvSpPr>
         <p:spPr>
           <a:xfrm>
-            <a:off x="3232727" y="4225192"/>
+            <a:off x="4201881" y="1127789"/>
             <a:ext cx="5477164" cy="369332"/>
           </a:xfrm>
           <a:prstGeom prst="rect">
@@ -10203,7 +10345,7 @@
         </p:blipFill>
         <p:spPr>
           <a:xfrm>
-            <a:off x="3614016" y="5690700"/>
+            <a:off x="8837401" y="1385599"/>
             <a:ext cx="3060774" cy="820936"/>
           </a:xfrm>
           <a:prstGeom prst="rect">
@@ -10219,7 +10361,7 @@
         </p:nvSpPr>
         <p:spPr>
           <a:xfrm>
-            <a:off x="2364509" y="5938982"/>
+            <a:off x="8837401" y="943123"/>
             <a:ext cx="1290738" cy="369332"/>
           </a:xfrm>
           <a:prstGeom prst="rect">
@@ -10311,7 +10453,7 @@
           <a:lstStyle/>
           <a:p>
             <a:r>
-              <a:rPr lang="en-US" altLang="zh-CN">
+              <a:rPr lang="en-US" altLang="zh-CN" dirty="0">
                 <a:sym typeface="+mn-ea"/>
               </a:rPr>
               <a:t>Shared library</a:t>
@@ -10320,7 +10462,7 @@
           <a:p>
             <a:pPr lvl="1"/>
             <a:r>
-              <a:rPr lang="en-US" sz="2400">
+              <a:rPr lang="en-US" sz="2400" dirty="0">
                 <a:sym typeface="+mn-ea"/>
               </a:rPr>
               <a:t>Build</a:t>
@@ -10329,7 +10471,7 @@
           <a:p>
             <a:pPr lvl="1"/>
             <a:r>
-              <a:rPr lang="en-US" sz="2400">
+              <a:rPr lang="en-US" sz="2400" dirty="0">
                 <a:sym typeface="+mn-ea"/>
               </a:rPr>
               <a:t>Use</a:t>
@@ -10338,45 +10480,48 @@
           <a:p>
             <a:pPr lvl="1"/>
             <a:r>
-              <a:rPr lang="en-US" sz="2400">
+              <a:rPr lang="en-US" sz="2400" dirty="0" err="1">
                 <a:sym typeface="+mn-ea"/>
               </a:rPr>
               <a:t>Makefile</a:t>
             </a:r>
-          </a:p>
-          <a:p>
-            <a:pPr lvl="1"/>
-            <a:r>
-              <a:rPr lang="en-US" sz="2400">
-                <a:sym typeface="+mn-ea"/>
-              </a:rPr>
-              <a:t>CMakelists.txt</a:t>
-            </a:r>
-            <a:endParaRPr lang="en-US" altLang="zh-CN">
+            <a:endParaRPr lang="en-US" sz="2400" dirty="0">
               <a:sym typeface="+mn-ea"/>
             </a:endParaRPr>
           </a:p>
           <a:p>
+            <a:pPr lvl="1"/>
+            <a:r>
+              <a:rPr lang="en-US" sz="2400" dirty="0" err="1">
+                <a:sym typeface="+mn-ea"/>
+              </a:rPr>
+              <a:t>CMakelists.txt</a:t>
+            </a:r>
+            <a:endParaRPr lang="en-US" altLang="zh-CN" dirty="0">
+              <a:sym typeface="+mn-ea"/>
+            </a:endParaRPr>
+          </a:p>
+          <a:p>
             <a:pPr lvl="2"/>
-            <a:endParaRPr lang="zh-CN" altLang="en-US"/>
-          </a:p>
-          <a:p>
-            <a:r>
-              <a:rPr lang="en-US" altLang="zh-CN"/>
+            <a:endParaRPr lang="zh-CN" altLang="en-US" dirty="0"/>
+          </a:p>
+          <a:p>
+            <a:r>
+              <a:rPr lang="en-US" altLang="zh-CN" dirty="0"/>
               <a:t>Function and Memory</a:t>
             </a:r>
           </a:p>
           <a:p>
             <a:pPr lvl="1"/>
             <a:r>
-              <a:rPr lang="en-US" altLang="zh-CN"/>
+              <a:rPr lang="en-US" altLang="zh-CN" dirty="0"/>
               <a:t>function address</a:t>
             </a:r>
           </a:p>
           <a:p>
             <a:pPr lvl="1"/>
             <a:r>
-              <a:rPr lang="en-US" altLang="zh-CN"/>
+              <a:rPr lang="en-US" altLang="zh-CN" dirty="0"/>
               <a:t>maps, executable memory</a:t>
             </a:r>
           </a:p>
@@ -10384,38 +10529,40 @@
             <a:pPr marL="457200" lvl="1" indent="0">
               <a:buNone/>
             </a:pPr>
-            <a:endParaRPr lang="en-US" altLang="zh-CN"/>
-          </a:p>
-          <a:p>
-            <a:r>
-              <a:rPr lang="en-US" altLang="zh-CN"/>
-              <a:t>Practice</a:t>
-            </a:r>
-            <a:endParaRPr lang="zh-CN" altLang="en-US"/>
+            <a:endParaRPr lang="en-US" altLang="zh-CN" dirty="0"/>
+          </a:p>
+          <a:p>
+            <a:r>
+              <a:rPr lang="en-US" altLang="zh-CN" dirty="0">
+                <a:sym typeface="+mn-ea"/>
+              </a:rPr>
+              <a:t>Exercises</a:t>
+            </a:r>
+            <a:endParaRPr lang="zh-CN" altLang="en-US" dirty="0"/>
           </a:p>
           <a:p>
             <a:pPr lvl="1"/>
-            <a:endParaRPr lang="zh-CN" altLang="en-US"/>
+            <a:endParaRPr lang="zh-CN" altLang="en-US" dirty="0"/>
           </a:p>
           <a:p>
             <a:pPr lvl="1"/>
-            <a:endParaRPr lang="zh-CN" altLang="en-US"/>
+            <a:endParaRPr lang="zh-CN" altLang="en-US" dirty="0"/>
           </a:p>
           <a:p>
             <a:pPr marL="457200" lvl="1" indent="0">
               <a:buNone/>
             </a:pPr>
-            <a:endParaRPr lang="en-US" altLang="zh-CN">
+            <a:endParaRPr lang="en-US" altLang="zh-CN" dirty="0">
               <a:highlight>
                 <a:srgbClr val="FFFF00"/>
               </a:highlight>
             </a:endParaRPr>
           </a:p>
           <a:p>
-            <a:endParaRPr lang="en-US" altLang="zh-CN"/>
-          </a:p>
-          <a:p>
-            <a:endParaRPr lang="zh-CN" altLang="en-US"/>
+            <a:endParaRPr lang="en-US" altLang="zh-CN" dirty="0"/>
+          </a:p>
+          <a:p>
+            <a:endParaRPr lang="zh-CN" altLang="en-US" dirty="0"/>
           </a:p>
         </p:txBody>
       </p:sp>
